--- a/BLOCKCHAIN.pptx
+++ b/BLOCKCHAIN.pptx
@@ -138,7 +138,7 @@
 <file path=ppt/revisionInfo.xml><?xml version="1.0" encoding="utf-8"?>
 <p1510:revInfo xmlns:a="http://schemas.openxmlformats.org/drawingml/2006/main" xmlns:r="http://schemas.openxmlformats.org/officeDocument/2006/relationships" xmlns:p1510="http://schemas.microsoft.com/office/powerpoint/2015/10/main">
   <p1510:revLst>
-    <p1510:client id="{6D443066-FEF4-4DDC-9AE6-7093D44EE7E7}" v="64" dt="2026-07-09T23:44:43.247"/>
+    <p1510:client id="{6D443066-FEF4-4DDC-9AE6-7093D44EE7E7}" v="65" dt="2026-07-10T06:33:16.500"/>
     <p1510:client id="{B8742529-D5D3-400D-BF7D-9217F4328434}" v="130" dt="2026-07-09T07:56:36.456"/>
   </p1510:revLst>
 </p1510:revInfo>
@@ -149,7 +149,7 @@
   <pc:docChgLst>
     <pc:chgData name="Ashish Chopra" userId="73b777bb-d56d-4042-ab11-fa04ce11e99f" providerId="ADAL" clId="{375ACA70-C26F-4825-A925-AA60B44A12C0}"/>
     <pc:docChg chg="undo redo custSel addSld delSld modSld sldOrd delMainMaster">
-      <pc:chgData name="Ashish Chopra" userId="73b777bb-d56d-4042-ab11-fa04ce11e99f" providerId="ADAL" clId="{375ACA70-C26F-4825-A925-AA60B44A12C0}" dt="2026-07-09T23:48:46.771" v="35365" actId="14100"/>
+      <pc:chgData name="Ashish Chopra" userId="73b777bb-d56d-4042-ab11-fa04ce11e99f" providerId="ADAL" clId="{375ACA70-C26F-4825-A925-AA60B44A12C0}" dt="2026-07-10T06:33:25.332" v="35373" actId="20577"/>
       <pc:docMkLst>
         <pc:docMk/>
       </pc:docMkLst>
@@ -1070,7 +1070,7 @@
         </pc:picChg>
       </pc:sldChg>
       <pc:sldChg chg="addSp delSp modSp add mod">
-        <pc:chgData name="Ashish Chopra" userId="73b777bb-d56d-4042-ab11-fa04ce11e99f" providerId="ADAL" clId="{375ACA70-C26F-4825-A925-AA60B44A12C0}" dt="2026-07-09T23:48:21.628" v="35353" actId="1035"/>
+        <pc:chgData name="Ashish Chopra" userId="73b777bb-d56d-4042-ab11-fa04ce11e99f" providerId="ADAL" clId="{375ACA70-C26F-4825-A925-AA60B44A12C0}" dt="2026-07-10T06:33:25.332" v="35373" actId="20577"/>
         <pc:sldMkLst>
           <pc:docMk/>
           <pc:sldMk cId="1852570336" sldId="306"/>
@@ -1108,7 +1108,7 @@
           </ac:spMkLst>
         </pc:spChg>
         <pc:spChg chg="add mod">
-          <ac:chgData name="Ashish Chopra" userId="73b777bb-d56d-4042-ab11-fa04ce11e99f" providerId="ADAL" clId="{375ACA70-C26F-4825-A925-AA60B44A12C0}" dt="2026-07-09T23:26:14.761" v="34731" actId="33524"/>
+          <ac:chgData name="Ashish Chopra" userId="73b777bb-d56d-4042-ab11-fa04ce11e99f" providerId="ADAL" clId="{375ACA70-C26F-4825-A925-AA60B44A12C0}" dt="2026-07-10T06:33:25.332" v="35373" actId="20577"/>
           <ac:spMkLst>
             <pc:docMk/>
             <pc:sldMk cId="1852570336" sldId="306"/>
@@ -2116,78 +2116,6 @@
           <pc:docMk/>
           <pc:sldMk cId="1041956338" sldId="317"/>
         </pc:sldMkLst>
-        <pc:spChg chg="mod">
-          <ac:chgData name="Ashish Chopra" userId="73b777bb-d56d-4042-ab11-fa04ce11e99f" providerId="ADAL" clId="{375ACA70-C26F-4825-A925-AA60B44A12C0}" dt="2026-07-08T04:04:09.348" v="29969" actId="1036"/>
-          <ac:spMkLst>
-            <pc:docMk/>
-            <pc:sldMk cId="1041956338" sldId="317"/>
-            <ac:spMk id="11" creationId="{7E4A60C8-2692-5B8C-BB41-27F878336091}"/>
-          </ac:spMkLst>
-        </pc:spChg>
-        <pc:spChg chg="del">
-          <ac:chgData name="Ashish Chopra" userId="73b777bb-d56d-4042-ab11-fa04ce11e99f" providerId="ADAL" clId="{375ACA70-C26F-4825-A925-AA60B44A12C0}" dt="2026-07-08T03:59:27.443" v="29841" actId="478"/>
-          <ac:spMkLst>
-            <pc:docMk/>
-            <pc:sldMk cId="1041956338" sldId="317"/>
-            <ac:spMk id="13" creationId="{C143D272-0F28-381B-DADB-7D18D6188AB5}"/>
-          </ac:spMkLst>
-        </pc:spChg>
-        <pc:spChg chg="add mod">
-          <ac:chgData name="Ashish Chopra" userId="73b777bb-d56d-4042-ab11-fa04ce11e99f" providerId="ADAL" clId="{375ACA70-C26F-4825-A925-AA60B44A12C0}" dt="2026-07-08T04:03:22.008" v="29930" actId="1076"/>
-          <ac:spMkLst>
-            <pc:docMk/>
-            <pc:sldMk cId="1041956338" sldId="317"/>
-            <ac:spMk id="14" creationId="{DF1D184F-6682-768E-7DD0-22D1807FE531}"/>
-          </ac:spMkLst>
-        </pc:spChg>
-        <pc:spChg chg="add mod">
-          <ac:chgData name="Ashish Chopra" userId="73b777bb-d56d-4042-ab11-fa04ce11e99f" providerId="ADAL" clId="{375ACA70-C26F-4825-A925-AA60B44A12C0}" dt="2026-07-08T04:03:37.659" v="29940" actId="1076"/>
-          <ac:spMkLst>
-            <pc:docMk/>
-            <pc:sldMk cId="1041956338" sldId="317"/>
-            <ac:spMk id="16" creationId="{180B93F1-0E48-192E-B5C4-450A2FBFE26F}"/>
-          </ac:spMkLst>
-        </pc:spChg>
-        <pc:graphicFrameChg chg="del">
-          <ac:chgData name="Ashish Chopra" userId="73b777bb-d56d-4042-ab11-fa04ce11e99f" providerId="ADAL" clId="{375ACA70-C26F-4825-A925-AA60B44A12C0}" dt="2026-07-08T03:59:25.271" v="29840" actId="478"/>
-          <ac:graphicFrameMkLst>
-            <pc:docMk/>
-            <pc:sldMk cId="1041956338" sldId="317"/>
-            <ac:graphicFrameMk id="7" creationId="{A9E5895B-C85F-FF00-BE11-91D90D8A3C1F}"/>
-          </ac:graphicFrameMkLst>
-        </pc:graphicFrameChg>
-        <pc:picChg chg="add mod">
-          <ac:chgData name="Ashish Chopra" userId="73b777bb-d56d-4042-ab11-fa04ce11e99f" providerId="ADAL" clId="{375ACA70-C26F-4825-A925-AA60B44A12C0}" dt="2026-07-08T04:03:03.868" v="29903" actId="1076"/>
-          <ac:picMkLst>
-            <pc:docMk/>
-            <pc:sldMk cId="1041956338" sldId="317"/>
-            <ac:picMk id="3" creationId="{651576A6-7E7C-3F45-9323-318021C1863C}"/>
-          </ac:picMkLst>
-        </pc:picChg>
-        <pc:picChg chg="add mod">
-          <ac:chgData name="Ashish Chopra" userId="73b777bb-d56d-4042-ab11-fa04ce11e99f" providerId="ADAL" clId="{375ACA70-C26F-4825-A925-AA60B44A12C0}" dt="2026-07-08T04:03:45.105" v="29950" actId="1036"/>
-          <ac:picMkLst>
-            <pc:docMk/>
-            <pc:sldMk cId="1041956338" sldId="317"/>
-            <ac:picMk id="5" creationId="{42782DEA-8BAF-7590-EB74-484CF4F9F0F0}"/>
-          </ac:picMkLst>
-        </pc:picChg>
-        <pc:picChg chg="add mod">
-          <ac:chgData name="Ashish Chopra" userId="73b777bb-d56d-4042-ab11-fa04ce11e99f" providerId="ADAL" clId="{375ACA70-C26F-4825-A925-AA60B44A12C0}" dt="2026-07-08T04:03:53.303" v="29953" actId="14100"/>
-          <ac:picMkLst>
-            <pc:docMk/>
-            <pc:sldMk cId="1041956338" sldId="317"/>
-            <ac:picMk id="8" creationId="{3E955EED-A74F-577C-4610-D365BA34293E}"/>
-          </ac:picMkLst>
-        </pc:picChg>
-        <pc:picChg chg="add mod">
-          <ac:chgData name="Ashish Chopra" userId="73b777bb-d56d-4042-ab11-fa04ce11e99f" providerId="ADAL" clId="{375ACA70-C26F-4825-A925-AA60B44A12C0}" dt="2026-07-08T04:04:00.515" v="29955" actId="14100"/>
-          <ac:picMkLst>
-            <pc:docMk/>
-            <pc:sldMk cId="1041956338" sldId="317"/>
-            <ac:picMk id="10" creationId="{6D61FBC1-B049-6089-429B-5EB050EA64BE}"/>
-          </ac:picMkLst>
-        </pc:picChg>
       </pc:sldChg>
       <pc:sldChg chg="addSp delSp modSp add del mod">
         <pc:chgData name="Ashish Chopra" userId="73b777bb-d56d-4042-ab11-fa04ce11e99f" providerId="ADAL" clId="{375ACA70-C26F-4825-A925-AA60B44A12C0}" dt="2026-07-09T22:43:06.959" v="34005" actId="47"/>
@@ -15005,6 +14933,77 @@
           </a:bodyPr>
           <a:lstStyle/>
           <a:p>
+            <a:pPr>
+              <a:lnSpc>
+                <a:spcPts val="1950"/>
+              </a:lnSpc>
+            </a:pPr>
+            <a:r>
+              <a:rPr lang="en-AU" sz="1000" b="1" dirty="0"/>
+              <a:t>1. Full Network Deployment</a:t>
+            </a:r>
+          </a:p>
+          <a:p>
+            <a:r>
+              <a:rPr lang="en-AU" sz="1000" dirty="0"/>
+              <a:t>The network itself is usually deployed using:</a:t>
+            </a:r>
+          </a:p>
+          <a:p>
+            <a:pPr marL="171450" indent="-171450">
+              <a:buFont typeface="Arial" panose="020B0604020202020204" pitchFamily="34" charset="0"/>
+              <a:buChar char="•"/>
+            </a:pPr>
+            <a:r>
+              <a:rPr lang="en-AU" sz="1000" b="1" dirty="0"/>
+              <a:t>Docker and Docker Compose</a:t>
+            </a:r>
+            <a:r>
+              <a:rPr lang="en-AU" sz="1000" dirty="0"/>
+              <a:t>: Official samples use YAML files to deploy multiple peers, </a:t>
+            </a:r>
+            <a:r>
+              <a:rPr lang="en-AU" sz="1000" dirty="0" err="1"/>
+              <a:t>orderers</a:t>
+            </a:r>
+            <a:r>
+              <a:rPr lang="en-AU" sz="1000" dirty="0"/>
+              <a:t>, and CAs.</a:t>
+            </a:r>
+          </a:p>
+          <a:p>
+            <a:pPr marL="171450" indent="-171450">
+              <a:buFont typeface="Arial" panose="020B0604020202020204" pitchFamily="34" charset="0"/>
+              <a:buChar char="•"/>
+            </a:pPr>
+            <a:r>
+              <a:rPr lang="en-AU" sz="1000" b="1" dirty="0"/>
+              <a:t>Kubernetes/Helm</a:t>
+            </a:r>
+            <a:r>
+              <a:rPr lang="en-AU" sz="1000" dirty="0"/>
+              <a:t>: For scalable and production-grade deployments, many enterprises deploy Fabric in Kubernetes clusters.</a:t>
+            </a:r>
+          </a:p>
+          <a:p>
+            <a:pPr marL="171450" indent="-171450">
+              <a:buFont typeface="Arial" panose="020B0604020202020204" pitchFamily="34" charset="0"/>
+              <a:buChar char="•"/>
+            </a:pPr>
+            <a:r>
+              <a:rPr lang="en-AU" sz="1000" b="1" dirty="0"/>
+              <a:t>Fabric Test Networks</a:t>
+            </a:r>
+            <a:r>
+              <a:rPr lang="en-AU" sz="1000" dirty="0"/>
+              <a:t>: Hyperledger provides scripts and samples to quickly bring up a network for testing (test-network folder in Fabric samples).</a:t>
+            </a:r>
+            <a:endParaRPr lang="en-AU" sz="1000" b="1" dirty="0">
+              <a:effectLst/>
+              <a:latin typeface="+mj-lt"/>
+            </a:endParaRPr>
+          </a:p>
+          <a:p>
             <a:pPr marL="0" marR="0" indent="0" algn="l">
               <a:lnSpc>
                 <a:spcPts val="1950"/>
@@ -15013,10 +15012,23 @@
             </a:pPr>
             <a:r>
               <a:rPr lang="en-AU" sz="1000" b="1" dirty="0">
+                <a:latin typeface="+mj-lt"/>
+              </a:rPr>
+              <a:t>2</a:t>
+            </a:r>
+            <a:r>
+              <a:rPr lang="en-AU" sz="1000" b="1">
                 <a:effectLst/>
                 <a:latin typeface="+mj-lt"/>
               </a:rPr>
-              <a:t>1. Language Options for Interacting with Fabric</a:t>
+              <a:t>. </a:t>
+            </a:r>
+            <a:r>
+              <a:rPr lang="en-AU" sz="1000" b="1" dirty="0">
+                <a:effectLst/>
+                <a:latin typeface="+mj-lt"/>
+              </a:rPr>
+              <a:t>Language Options for Interacting with Fabric</a:t>
             </a:r>
           </a:p>
           <a:p>
@@ -15157,107 +15169,6 @@
                 <a:latin typeface="+mj-lt"/>
               </a:rPr>
               <a:t>—they are not used to deploy the network itself.</a:t>
-            </a:r>
-          </a:p>
-          <a:p>
-            <a:pPr marL="0" marR="0" indent="0" algn="l">
-              <a:lnSpc>
-                <a:spcPts val="1950"/>
-              </a:lnSpc>
-              <a:buNone/>
-            </a:pPr>
-            <a:r>
-              <a:rPr lang="en-AU" sz="1000" b="1" dirty="0">
-                <a:effectLst/>
-                <a:latin typeface="+mj-lt"/>
-              </a:rPr>
-              <a:t>2. Full Network Deployment</a:t>
-            </a:r>
-          </a:p>
-          <a:p>
-            <a:pPr indent="0" algn="l">
-              <a:buNone/>
-            </a:pPr>
-            <a:r>
-              <a:rPr lang="en-AU" sz="1000" b="0" i="0" dirty="0">
-                <a:effectLst/>
-                <a:latin typeface="+mj-lt"/>
-              </a:rPr>
-              <a:t>The network itself is usually deployed using:</a:t>
-            </a:r>
-          </a:p>
-          <a:p>
-            <a:pPr marL="171450" marR="0" indent="-171450" algn="l">
-              <a:buFont typeface="Arial" panose="020B0604020202020204" pitchFamily="34" charset="0"/>
-              <a:buChar char="•"/>
-            </a:pPr>
-            <a:r>
-              <a:rPr lang="en-AU" sz="1000" b="1" i="0" dirty="0">
-                <a:effectLst/>
-                <a:latin typeface="+mj-lt"/>
-              </a:rPr>
-              <a:t>Docker and Docker Compose</a:t>
-            </a:r>
-            <a:r>
-              <a:rPr lang="en-AU" sz="1000" b="0" i="0" dirty="0">
-                <a:effectLst/>
-                <a:latin typeface="+mj-lt"/>
-              </a:rPr>
-              <a:t>: Official samples use YAML files to deploy multiple peers, </a:t>
-            </a:r>
-            <a:r>
-              <a:rPr lang="en-AU" sz="1000" b="0" i="0" dirty="0" err="1">
-                <a:effectLst/>
-                <a:latin typeface="+mj-lt"/>
-              </a:rPr>
-              <a:t>orderers</a:t>
-            </a:r>
-            <a:r>
-              <a:rPr lang="en-AU" sz="1000" b="0" i="0" dirty="0">
-                <a:effectLst/>
-                <a:latin typeface="+mj-lt"/>
-              </a:rPr>
-              <a:t>, and CAs.</a:t>
-            </a:r>
-          </a:p>
-          <a:p>
-            <a:pPr marL="171450" marR="0" indent="-171450" algn="l">
-              <a:buFont typeface="Arial" panose="020B0604020202020204" pitchFamily="34" charset="0"/>
-              <a:buChar char="•"/>
-            </a:pPr>
-            <a:r>
-              <a:rPr lang="en-AU" sz="1000" b="1" i="0" dirty="0">
-                <a:effectLst/>
-                <a:latin typeface="+mj-lt"/>
-              </a:rPr>
-              <a:t>Kubernetes/Helm</a:t>
-            </a:r>
-            <a:r>
-              <a:rPr lang="en-AU" sz="1000" b="0" i="0" dirty="0">
-                <a:effectLst/>
-                <a:latin typeface="+mj-lt"/>
-              </a:rPr>
-              <a:t>: For scalable and production-grade deployments, many enterprises deploy Fabric in Kubernetes clusters.</a:t>
-            </a:r>
-          </a:p>
-          <a:p>
-            <a:pPr marL="171450" marR="0" indent="-171450" algn="l">
-              <a:buFont typeface="Arial" panose="020B0604020202020204" pitchFamily="34" charset="0"/>
-              <a:buChar char="•"/>
-            </a:pPr>
-            <a:r>
-              <a:rPr lang="en-AU" sz="1000" b="1" i="0" dirty="0">
-                <a:effectLst/>
-                <a:latin typeface="+mj-lt"/>
-              </a:rPr>
-              <a:t>Fabric Test Networks</a:t>
-            </a:r>
-            <a:r>
-              <a:rPr lang="en-AU" sz="1000" b="0" i="0" dirty="0">
-                <a:effectLst/>
-                <a:latin typeface="+mj-lt"/>
-              </a:rPr>
-              <a:t>: Hyperledger provides scripts and samples to quickly bring up a network for testing (test-network folder in Fabric samples).</a:t>
             </a:r>
           </a:p>
           <a:p>

--- a/BLOCKCHAIN.pptx
+++ b/BLOCKCHAIN.pptx
@@ -3094,7 +3094,7 @@
           <a:p>
             <a:fld id="{3BAD7437-FAE0-451C-8BB2-D27B3E1DE48E}" type="datetimeFigureOut">
               <a:rPr lang="en-AU" smtClean="0"/>
-              <a:t>10/07/2026</a:t>
+              <a:t>8/10/2026</a:t>
             </a:fld>
             <a:endParaRPr lang="en-AU"/>
           </a:p>
@@ -3743,7 +3743,7 @@
           <a:p>
             <a:fld id="{5BCAD085-E8A6-8845-BD4E-CB4CCA059FC4}" type="datetimeFigureOut">
               <a:rPr lang="en-US" smtClean="0"/>
-              <a:t>7/10/2026</a:t>
+              <a:t>10/8/2026</a:t>
             </a:fld>
             <a:endParaRPr lang="en-US"/>
           </a:p>
@@ -3911,7 +3911,7 @@
           <a:p>
             <a:fld id="{5BCAD085-E8A6-8845-BD4E-CB4CCA059FC4}" type="datetimeFigureOut">
               <a:rPr lang="en-US" smtClean="0"/>
-              <a:t>7/10/2026</a:t>
+              <a:t>10/8/2026</a:t>
             </a:fld>
             <a:endParaRPr lang="en-US"/>
           </a:p>
@@ -4089,7 +4089,7 @@
           <a:p>
             <a:fld id="{5BCAD085-E8A6-8845-BD4E-CB4CCA059FC4}" type="datetimeFigureOut">
               <a:rPr lang="en-US" smtClean="0"/>
-              <a:t>7/10/2026</a:t>
+              <a:t>10/8/2026</a:t>
             </a:fld>
             <a:endParaRPr lang="en-US"/>
           </a:p>
@@ -4257,7 +4257,7 @@
           <a:p>
             <a:fld id="{5BCAD085-E8A6-8845-BD4E-CB4CCA059FC4}" type="datetimeFigureOut">
               <a:rPr lang="en-US" smtClean="0"/>
-              <a:t>7/10/2026</a:t>
+              <a:t>10/8/2026</a:t>
             </a:fld>
             <a:endParaRPr lang="en-US"/>
           </a:p>
@@ -4502,7 +4502,7 @@
           <a:p>
             <a:fld id="{5BCAD085-E8A6-8845-BD4E-CB4CCA059FC4}" type="datetimeFigureOut">
               <a:rPr lang="en-US" smtClean="0"/>
-              <a:t>7/10/2026</a:t>
+              <a:t>10/8/2026</a:t>
             </a:fld>
             <a:endParaRPr lang="en-US"/>
           </a:p>
@@ -4731,7 +4731,7 @@
           <a:p>
             <a:fld id="{5BCAD085-E8A6-8845-BD4E-CB4CCA059FC4}" type="datetimeFigureOut">
               <a:rPr lang="en-US" smtClean="0"/>
-              <a:t>7/10/2026</a:t>
+              <a:t>10/8/2026</a:t>
             </a:fld>
             <a:endParaRPr lang="en-US"/>
           </a:p>
@@ -5095,7 +5095,7 @@
           <a:p>
             <a:fld id="{5BCAD085-E8A6-8845-BD4E-CB4CCA059FC4}" type="datetimeFigureOut">
               <a:rPr lang="en-US" smtClean="0"/>
-              <a:t>7/10/2026</a:t>
+              <a:t>10/8/2026</a:t>
             </a:fld>
             <a:endParaRPr lang="en-US"/>
           </a:p>
@@ -5212,7 +5212,7 @@
           <a:p>
             <a:fld id="{5BCAD085-E8A6-8845-BD4E-CB4CCA059FC4}" type="datetimeFigureOut">
               <a:rPr lang="en-US" smtClean="0"/>
-              <a:t>7/10/2026</a:t>
+              <a:t>10/8/2026</a:t>
             </a:fld>
             <a:endParaRPr lang="en-US"/>
           </a:p>
@@ -5307,7 +5307,7 @@
           <a:p>
             <a:fld id="{5BCAD085-E8A6-8845-BD4E-CB4CCA059FC4}" type="datetimeFigureOut">
               <a:rPr lang="en-US" smtClean="0"/>
-              <a:t>7/10/2026</a:t>
+              <a:t>10/8/2026</a:t>
             </a:fld>
             <a:endParaRPr lang="en-US"/>
           </a:p>
@@ -5582,7 +5582,7 @@
           <a:p>
             <a:fld id="{5BCAD085-E8A6-8845-BD4E-CB4CCA059FC4}" type="datetimeFigureOut">
               <a:rPr lang="en-US" smtClean="0"/>
-              <a:t>7/10/2026</a:t>
+              <a:t>10/8/2026</a:t>
             </a:fld>
             <a:endParaRPr lang="en-US"/>
           </a:p>
@@ -5837,7 +5837,7 @@
           <a:p>
             <a:fld id="{5BCAD085-E8A6-8845-BD4E-CB4CCA059FC4}" type="datetimeFigureOut">
               <a:rPr lang="en-US" smtClean="0"/>
-              <a:t>7/10/2026</a:t>
+              <a:t>10/8/2026</a:t>
             </a:fld>
             <a:endParaRPr lang="en-US"/>
           </a:p>
@@ -6048,7 +6048,7 @@
           <a:p>
             <a:fld id="{5BCAD085-E8A6-8845-BD4E-CB4CCA059FC4}" type="datetimeFigureOut">
               <a:rPr lang="en-US" smtClean="0"/>
-              <a:t>7/10/2026</a:t>
+              <a:t>10/8/2026</a:t>
             </a:fld>
             <a:endParaRPr lang="en-US"/>
           </a:p>
@@ -6677,34 +6677,6 @@
           </a:p>
         </p:txBody>
       </p:sp>
-      <p:pic>
-        <p:nvPicPr>
-          <p:cNvPr id="8" name="Picture 7">
-            <a:extLst>
-              <a:ext uri="{FF2B5EF4-FFF2-40B4-BE49-F238E27FC236}">
-                <a16:creationId xmlns:a16="http://schemas.microsoft.com/office/drawing/2014/main" id="{A9E188E0-E73F-7AA5-04EC-D27495EDFADE}"/>
-              </a:ext>
-            </a:extLst>
-          </p:cNvPr>
-          <p:cNvPicPr>
-            <a:picLocks noChangeAspect="1"/>
-          </p:cNvPicPr>
-          <p:nvPr/>
-        </p:nvPicPr>
-        <p:blipFill>
-          <a:blip r:embed="rId2"/>
-          <a:stretch/>
-        </p:blipFill>
-        <p:spPr>
-          <a:xfrm>
-            <a:off x="5088463" y="3312247"/>
-            <a:ext cx="1467055" cy="400105"/>
-          </a:xfrm>
-          <a:prstGeom prst="rect">
-            <a:avLst/>
-          </a:prstGeom>
-        </p:spPr>
-      </p:pic>
     </p:spTree>
   </p:cSld>
   <p:clrMapOvr>
